--- a/catalog/samples/card_grid_2x2.pptx
+++ b/catalog/samples/card_grid_2x2.pptx
@@ -1072,7 +1072,7 @@
           </a:p>
           <a:p>
             <a:r>
-              <a:t>  "template_sha256": "c1631f72d4011ae96e1366233d5733988504f3cfa5f97edd3cac16e6b2dc7c65"</a:t>
+              <a:t>  "template_sha256": "970d49cce6466e9a016a8750c76b5703bd8b67407b6aa21e6b5b4195f1a90275"</a:t>
             </a:r>
           </a:p>
           <a:p>
